--- a/Pregrado/Trabajo de grado 3/Clases/Sesion 15 - Cierre administrativo · recepción de entregables/Presentacion.pptx
+++ b/Pregrado/Trabajo de grado 3/Clases/Sesion 15 - Cierre administrativo · recepción de entregables/Presentacion.pptx
@@ -29,6 +29,7 @@
     <p:sldId id="277" r:id="rId28"/>
     <p:sldId id="278" r:id="rId29"/>
     <p:sldId id="279" r:id="rId30"/>
+    <p:sldId id="280" r:id="rId31"/>
   </p:sldIdLst>
   <p:sldSz cx="12191695" cy="6858000" type="screen4x3"/>
   <p:notesSz cx="6858000" cy="9144000"/>
@@ -3535,7 +3536,7 @@
                 </a:solidFill>
                 <a:latin typeface="Calibri"/>
               </a:rPr>
-              <a:t>Artículo final</a:t>
+              <a:t>Documento final</a:t>
             </a:r>
             <a:r>
               <a:rPr sz="1500" b="0" i="0">
@@ -6202,7 +6203,7 @@
                 </a:solidFill>
                 <a:latin typeface="Calibri"/>
               </a:rPr>
-              <a:t>TALLER — Verificación de recepción (20 minutos)</a:t>
+              <a:t>TALLER · Verificación de recepción</a:t>
             </a:r>
           </a:p>
         </p:txBody>
@@ -6215,8 +6216,8 @@
         </p:nvSpPr>
         <p:spPr>
           <a:xfrm>
-            <a:off x="640080" y="1691639"/>
-            <a:ext cx="10911535" cy="4617720"/>
+            <a:off x="640080" y="1280160"/>
+            <a:ext cx="10911535" cy="411480"/>
           </a:xfrm>
           <a:prstGeom prst="rect">
             <a:avLst/>
@@ -6229,6 +6230,41 @@
           </a:bodyPr>
           <a:lstStyle/>
           <a:p>
+            <a:pPr algn="ctr"/>
+            <a:r>
+              <a:rPr sz="1500" b="0" i="0">
+                <a:solidFill>
+                  <a:srgbClr val="2B2B2B"/>
+                </a:solidFill>
+                <a:latin typeface="Calibri"/>
+              </a:rPr>
+              <a:t>Individual, con CDigital abierto · el Docente acompaña resolviendo dudas de ubicación de entregas</a:t>
+            </a:r>
+          </a:p>
+        </p:txBody>
+      </p:sp>
+      <p:sp>
+        <p:nvSpPr>
+          <p:cNvPr id="5" name="TextBox 4"/>
+          <p:cNvSpPr txBox="1"/>
+          <p:nvPr/>
+        </p:nvSpPr>
+        <p:spPr>
+          <a:xfrm>
+            <a:off x="640080" y="2011679"/>
+            <a:ext cx="10911535" cy="4297680"/>
+          </a:xfrm>
+          <a:prstGeom prst="rect">
+            <a:avLst/>
+          </a:prstGeom>
+          <a:noFill/>
+        </p:spPr>
+        <p:txBody>
+          <a:bodyPr wrap="square" anchor="t" lIns="0" rIns="0" tIns="0" bIns="0">
+            <a:spAutoFit/>
+          </a:bodyPr>
+          <a:lstStyle/>
+          <a:p>
             <a:pPr>
               <a:spcAft>
                 <a:spcPts val="1000"/>
@@ -6250,7 +6286,7 @@
                 </a:solidFill>
                 <a:latin typeface="Calibri"/>
               </a:rPr>
-              <a:t>Consigna literal.</a:t>
+              <a:t>Al final tiene:</a:t>
             </a:r>
             <a:r>
               <a:rPr sz="1600" b="0" i="0">
@@ -6259,215 +6295,7 @@
                 </a:solidFill>
                 <a:latin typeface="Calibri"/>
               </a:rPr>
-              <a:t> Con CDigital abierto, entregue </a:t>
-            </a:r>
-            <a:r>
-              <a:rPr sz="1600" b="1" i="0">
-                <a:solidFill>
-                  <a:srgbClr val="2B2B2B"/>
-                </a:solidFill>
-                <a:latin typeface="Calibri"/>
-              </a:rPr>
-              <a:t>S15_CierreAdmin_Apellido</a:t>
-            </a:r>
-            <a:r>
-              <a:rPr sz="1600" b="0" i="0">
-                <a:solidFill>
-                  <a:srgbClr val="2B2B2B"/>
-                </a:solidFill>
-                <a:latin typeface="Calibri"/>
-              </a:rPr>
-              <a:t> con:</a:t>
-            </a:r>
-          </a:p>
-          <a:p>
-            <a:pPr lvl="1">
-              <a:spcAft>
-                <a:spcPts val="600"/>
-              </a:spcAft>
-            </a:pPr>
-            <a:r>
-              <a:rPr sz="1500" b="0" i="0">
-                <a:solidFill>
-                  <a:srgbClr val="2B2B2B"/>
-                </a:solidFill>
-                <a:latin typeface="Calibri"/>
-              </a:rPr>
-              <a:t>●   </a:t>
-            </a:r>
-            <a:r>
-              <a:rPr sz="1500" b="1" i="0">
-                <a:solidFill>
-                  <a:srgbClr val="2B2B2B"/>
-                </a:solidFill>
-                <a:latin typeface="Calibri"/>
-              </a:rPr>
-              <a:t>(1) El checklist de recepción completo</a:t>
-            </a:r>
-            <a:r>
-              <a:rPr sz="1500" b="0" i="0">
-                <a:solidFill>
-                  <a:srgbClr val="2B2B2B"/>
-                </a:solidFill>
-                <a:latin typeface="Calibri"/>
-              </a:rPr>
-              <a:t>, con las columnas entregable · cargado · confirmado · evidencia, cubriendo </a:t>
-            </a:r>
-            <a:r>
-              <a:rPr sz="1500" b="1" i="0">
-                <a:solidFill>
-                  <a:srgbClr val="2B2B2B"/>
-                </a:solidFill>
-                <a:latin typeface="Calibri"/>
-              </a:rPr>
-              <a:t>todos</a:t>
-            </a:r>
-            <a:r>
-              <a:rPr sz="1500" b="0" i="0">
-                <a:solidFill>
-                  <a:srgbClr val="2B2B2B"/>
-                </a:solidFill>
-                <a:latin typeface="Calibri"/>
-              </a:rPr>
-              <a:t> sus entregables del curso.</a:t>
-            </a:r>
-          </a:p>
-          <a:p>
-            <a:pPr lvl="1">
-              <a:spcAft>
-                <a:spcPts val="600"/>
-              </a:spcAft>
-            </a:pPr>
-            <a:r>
-              <a:rPr sz="1500" b="0" i="0">
-                <a:solidFill>
-                  <a:srgbClr val="2B2B2B"/>
-                </a:solidFill>
-                <a:latin typeface="Calibri"/>
-              </a:rPr>
-              <a:t>●   </a:t>
-            </a:r>
-            <a:r>
-              <a:rPr sz="1500" b="1" i="0">
-                <a:solidFill>
-                  <a:srgbClr val="2B2B2B"/>
-                </a:solidFill>
-                <a:latin typeface="Calibri"/>
-              </a:rPr>
-              <a:t>(2) Las capturas de evidencia</a:t>
-            </a:r>
-            <a:r>
-              <a:rPr sz="1500" b="0" i="0">
-                <a:solidFill>
-                  <a:srgbClr val="2B2B2B"/>
-                </a:solidFill>
-                <a:latin typeface="Calibri"/>
-              </a:rPr>
-              <a:t> de cada entrega confirmada (o el registro escrito si el campus no permite capturar).</a:t>
-            </a:r>
-          </a:p>
-          <a:p>
-            <a:pPr lvl="1">
-              <a:spcAft>
-                <a:spcPts val="600"/>
-              </a:spcAft>
-            </a:pPr>
-            <a:r>
-              <a:rPr sz="1500" b="0" i="0">
-                <a:solidFill>
-                  <a:srgbClr val="2B2B2B"/>
-                </a:solidFill>
-                <a:latin typeface="Calibri"/>
-              </a:rPr>
-              <a:t>●   </a:t>
-            </a:r>
-            <a:r>
-              <a:rPr sz="1500" b="1" i="0">
-                <a:solidFill>
-                  <a:srgbClr val="2B2B2B"/>
-                </a:solidFill>
-                <a:latin typeface="Calibri"/>
-              </a:rPr>
-              <a:t>(3) La lista de pendientes administrativos</a:t>
-            </a:r>
-            <a:r>
-              <a:rPr sz="1500" b="0" i="0">
-                <a:solidFill>
-                  <a:srgbClr val="2B2B2B"/>
-                </a:solidFill>
-                <a:latin typeface="Calibri"/>
-              </a:rPr>
-              <a:t>: qué falta, </a:t>
-            </a:r>
-            <a:r>
-              <a:rPr sz="1500" b="1" i="0">
-                <a:solidFill>
-                  <a:srgbClr val="2B2B2B"/>
-                </a:solidFill>
-                <a:latin typeface="Calibri"/>
-              </a:rPr>
-              <a:t>quién</a:t>
-            </a:r>
-            <a:r>
-              <a:rPr sz="1500" b="0" i="0">
-                <a:solidFill>
-                  <a:srgbClr val="2B2B2B"/>
-                </a:solidFill>
-                <a:latin typeface="Calibri"/>
-              </a:rPr>
-              <a:t> lo resuelve y </a:t>
-            </a:r>
-            <a:r>
-              <a:rPr sz="1500" b="1" i="0">
-                <a:solidFill>
-                  <a:srgbClr val="2B2B2B"/>
-                </a:solidFill>
-                <a:latin typeface="Calibri"/>
-              </a:rPr>
-              <a:t>para cuándo</a:t>
-            </a:r>
-            <a:r>
-              <a:rPr sz="1500" b="0" i="0">
-                <a:solidFill>
-                  <a:srgbClr val="2B2B2B"/>
-                </a:solidFill>
-                <a:latin typeface="Calibri"/>
-              </a:rPr>
-              <a:t>.</a:t>
-            </a:r>
-          </a:p>
-          <a:p>
-            <a:pPr lvl="1">
-              <a:spcAft>
-                <a:spcPts val="600"/>
-              </a:spcAft>
-            </a:pPr>
-            <a:r>
-              <a:rPr sz="1500" b="0" i="0">
-                <a:solidFill>
-                  <a:srgbClr val="2B2B2B"/>
-                </a:solidFill>
-                <a:latin typeface="Calibri"/>
-              </a:rPr>
-              <a:t>●   </a:t>
-            </a:r>
-            <a:r>
-              <a:rPr sz="1500" b="1" i="0">
-                <a:solidFill>
-                  <a:srgbClr val="2B2B2B"/>
-                </a:solidFill>
-                <a:latin typeface="Calibri"/>
-              </a:rPr>
-              <a:t>(4) La fecha de recepción de SU grupo</a:t>
-            </a:r>
-            <a:r>
-              <a:rPr sz="1500" b="0" i="0">
-                <a:solidFill>
-                  <a:srgbClr val="2B2B2B"/>
-                </a:solidFill>
-                <a:latin typeface="Calibri"/>
-              </a:rPr>
-              <a:t>, tomada del calendario oficial en CDigital.</a:t>
+              <a:t> el checklist de recepción con evidencia y la lista de pendientes administrativos.</a:t>
             </a:r>
           </a:p>
           <a:p>
@@ -6492,7 +6320,7 @@
                 </a:solidFill>
                 <a:latin typeface="Calibri"/>
               </a:rPr>
-              <a:t>Tiempo:</a:t>
+              <a:t>Paso 1</a:t>
             </a:r>
             <a:r>
               <a:rPr sz="1600" b="0" i="0">
@@ -6501,14 +6329,294 @@
                 </a:solidFill>
                 <a:latin typeface="Calibri"/>
               </a:rPr>
-              <a:t> 20 minutos. El Docente acompaña resolviendo dudas de ubicación de entregas.</a:t>
-            </a:r>
-          </a:p>
-        </p:txBody>
-      </p:sp>
-      <p:sp>
-        <p:nvSpPr>
-          <p:cNvPr id="5" name="TextBox 4"/>
+              <a:t> · </a:t>
+            </a:r>
+            <a:r>
+              <a:rPr sz="1600" b="1" i="0">
+                <a:solidFill>
+                  <a:srgbClr val="2B2B2B"/>
+                </a:solidFill>
+                <a:latin typeface="Calibri"/>
+              </a:rPr>
+              <a:t>El checklist de recepción completo</a:t>
+            </a:r>
+            <a:r>
+              <a:rPr sz="1600" b="0" i="0">
+                <a:solidFill>
+                  <a:srgbClr val="2B2B2B"/>
+                </a:solidFill>
+                <a:latin typeface="Calibri"/>
+              </a:rPr>
+              <a:t> —entregable · cargado · confirmado · evidencia—, cubriendo </a:t>
+            </a:r>
+            <a:r>
+              <a:rPr sz="1600" b="1" i="0">
+                <a:solidFill>
+                  <a:srgbClr val="2B2B2B"/>
+                </a:solidFill>
+                <a:latin typeface="Calibri"/>
+              </a:rPr>
+              <a:t>todos</a:t>
+            </a:r>
+            <a:r>
+              <a:rPr sz="1600" b="0" i="0">
+                <a:solidFill>
+                  <a:srgbClr val="2B2B2B"/>
+                </a:solidFill>
+                <a:latin typeface="Calibri"/>
+              </a:rPr>
+              <a:t> sus entregables del curso.</a:t>
+            </a:r>
+          </a:p>
+          <a:p>
+            <a:pPr>
+              <a:spcAft>
+                <a:spcPts val="1000"/>
+              </a:spcAft>
+            </a:pPr>
+            <a:r>
+              <a:rPr sz="1600" b="0" i="0">
+                <a:solidFill>
+                  <a:srgbClr val="2B2B2B"/>
+                </a:solidFill>
+                <a:latin typeface="Calibri"/>
+              </a:rPr>
+              <a:t>–   </a:t>
+            </a:r>
+            <a:r>
+              <a:rPr sz="1600" b="1" i="0">
+                <a:solidFill>
+                  <a:srgbClr val="2B2B2B"/>
+                </a:solidFill>
+                <a:latin typeface="Calibri"/>
+              </a:rPr>
+              <a:t>Paso 2</a:t>
+            </a:r>
+            <a:r>
+              <a:rPr sz="1600" b="0" i="0">
+                <a:solidFill>
+                  <a:srgbClr val="2B2B2B"/>
+                </a:solidFill>
+                <a:latin typeface="Calibri"/>
+              </a:rPr>
+              <a:t> · </a:t>
+            </a:r>
+            <a:r>
+              <a:rPr sz="1600" b="1" i="0">
+                <a:solidFill>
+                  <a:srgbClr val="2B2B2B"/>
+                </a:solidFill>
+                <a:latin typeface="Calibri"/>
+              </a:rPr>
+              <a:t>Las capturas de evidencia</a:t>
+            </a:r>
+            <a:r>
+              <a:rPr sz="1600" b="0" i="0">
+                <a:solidFill>
+                  <a:srgbClr val="2B2B2B"/>
+                </a:solidFill>
+                <a:latin typeface="Calibri"/>
+              </a:rPr>
+              <a:t> de cada entrega confirmada, o el registro escrito si el campus no permite capturar.</a:t>
+            </a:r>
+          </a:p>
+          <a:p>
+            <a:pPr>
+              <a:spcAft>
+                <a:spcPts val="1000"/>
+              </a:spcAft>
+            </a:pPr>
+            <a:r>
+              <a:rPr sz="1600" b="0" i="0">
+                <a:solidFill>
+                  <a:srgbClr val="2B2B2B"/>
+                </a:solidFill>
+                <a:latin typeface="Calibri"/>
+              </a:rPr>
+              <a:t>–   </a:t>
+            </a:r>
+            <a:r>
+              <a:rPr sz="1600" b="1" i="0">
+                <a:solidFill>
+                  <a:srgbClr val="2B2B2B"/>
+                </a:solidFill>
+                <a:latin typeface="Calibri"/>
+              </a:rPr>
+              <a:t>Paso 3</a:t>
+            </a:r>
+            <a:r>
+              <a:rPr sz="1600" b="0" i="0">
+                <a:solidFill>
+                  <a:srgbClr val="2B2B2B"/>
+                </a:solidFill>
+                <a:latin typeface="Calibri"/>
+              </a:rPr>
+              <a:t> · </a:t>
+            </a:r>
+            <a:r>
+              <a:rPr sz="1600" b="1" i="0">
+                <a:solidFill>
+                  <a:srgbClr val="2B2B2B"/>
+                </a:solidFill>
+                <a:latin typeface="Calibri"/>
+              </a:rPr>
+              <a:t>La lista de pendientes administrativos</a:t>
+            </a:r>
+            <a:r>
+              <a:rPr sz="1600" b="0" i="0">
+                <a:solidFill>
+                  <a:srgbClr val="2B2B2B"/>
+                </a:solidFill>
+                <a:latin typeface="Calibri"/>
+              </a:rPr>
+              <a:t>: qué falta, </a:t>
+            </a:r>
+            <a:r>
+              <a:rPr sz="1600" b="1" i="0">
+                <a:solidFill>
+                  <a:srgbClr val="2B2B2B"/>
+                </a:solidFill>
+                <a:latin typeface="Calibri"/>
+              </a:rPr>
+              <a:t>quién</a:t>
+            </a:r>
+            <a:r>
+              <a:rPr sz="1600" b="0" i="0">
+                <a:solidFill>
+                  <a:srgbClr val="2B2B2B"/>
+                </a:solidFill>
+                <a:latin typeface="Calibri"/>
+              </a:rPr>
+              <a:t> lo resuelve y </a:t>
+            </a:r>
+            <a:r>
+              <a:rPr sz="1600" b="1" i="0">
+                <a:solidFill>
+                  <a:srgbClr val="2B2B2B"/>
+                </a:solidFill>
+                <a:latin typeface="Calibri"/>
+              </a:rPr>
+              <a:t>para cuándo</a:t>
+            </a:r>
+            <a:r>
+              <a:rPr sz="1600" b="0" i="0">
+                <a:solidFill>
+                  <a:srgbClr val="2B2B2B"/>
+                </a:solidFill>
+                <a:latin typeface="Calibri"/>
+              </a:rPr>
+              <a:t>.</a:t>
+            </a:r>
+          </a:p>
+          <a:p>
+            <a:pPr>
+              <a:spcAft>
+                <a:spcPts val="1000"/>
+              </a:spcAft>
+            </a:pPr>
+            <a:r>
+              <a:rPr sz="1600" b="0" i="0">
+                <a:solidFill>
+                  <a:srgbClr val="2B2B2B"/>
+                </a:solidFill>
+                <a:latin typeface="Calibri"/>
+              </a:rPr>
+              <a:t>–   </a:t>
+            </a:r>
+            <a:r>
+              <a:rPr sz="1600" b="1" i="0">
+                <a:solidFill>
+                  <a:srgbClr val="2B2B2B"/>
+                </a:solidFill>
+                <a:latin typeface="Calibri"/>
+              </a:rPr>
+              <a:t>Paso 4</a:t>
+            </a:r>
+            <a:r>
+              <a:rPr sz="1600" b="0" i="0">
+                <a:solidFill>
+                  <a:srgbClr val="2B2B2B"/>
+                </a:solidFill>
+                <a:latin typeface="Calibri"/>
+              </a:rPr>
+              <a:t> · </a:t>
+            </a:r>
+            <a:r>
+              <a:rPr sz="1600" b="1" i="0">
+                <a:solidFill>
+                  <a:srgbClr val="2B2B2B"/>
+                </a:solidFill>
+                <a:latin typeface="Calibri"/>
+              </a:rPr>
+              <a:t>La fecha de recepción de SU grupo</a:t>
+            </a:r>
+            <a:r>
+              <a:rPr sz="1600" b="0" i="0">
+                <a:solidFill>
+                  <a:srgbClr val="2B2B2B"/>
+                </a:solidFill>
+                <a:latin typeface="Calibri"/>
+              </a:rPr>
+              <a:t>, tomada del calendario oficial en CDigital.</a:t>
+            </a:r>
+          </a:p>
+          <a:p>
+            <a:pPr>
+              <a:spcAft>
+                <a:spcPts val="1000"/>
+              </a:spcAft>
+            </a:pPr>
+            <a:r>
+              <a:rPr sz="1600" b="0" i="0">
+                <a:solidFill>
+                  <a:srgbClr val="2B2B2B"/>
+                </a:solidFill>
+                <a:latin typeface="Calibri"/>
+              </a:rPr>
+              <a:t>–   </a:t>
+            </a:r>
+            <a:r>
+              <a:rPr sz="1600" b="1" i="0">
+                <a:solidFill>
+                  <a:srgbClr val="2B2B2B"/>
+                </a:solidFill>
+                <a:latin typeface="Calibri"/>
+              </a:rPr>
+              <a:t>En clase, sin falta:</a:t>
+            </a:r>
+            <a:r>
+              <a:rPr sz="1600" b="0" i="0">
+                <a:solidFill>
+                  <a:srgbClr val="2B2B2B"/>
+                </a:solidFill>
+                <a:latin typeface="Calibri"/>
+              </a:rPr>
+              <a:t> los </a:t>
+            </a:r>
+            <a:r>
+              <a:rPr sz="1600" b="1" i="0">
+                <a:solidFill>
+                  <a:srgbClr val="2B2B2B"/>
+                </a:solidFill>
+                <a:latin typeface="Calibri"/>
+              </a:rPr>
+              <a:t>4 pasos</a:t>
+            </a:r>
+            <a:r>
+              <a:rPr sz="1600" b="0" i="0">
+                <a:solidFill>
+                  <a:srgbClr val="2B2B2B"/>
+                </a:solidFill>
+                <a:latin typeface="Calibri"/>
+              </a:rPr>
+              <a:t>. Lo que no alcance, ciérrelo hoy mismo en autónomo.</a:t>
+            </a:r>
+          </a:p>
+        </p:txBody>
+      </p:sp>
+      <p:sp>
+        <p:nvSpPr>
+          <p:cNvPr id="6" name="TextBox 5"/>
           <p:cNvSpPr txBox="1"/>
           <p:nvPr/>
         </p:nvSpPr>
@@ -6641,7 +6749,7 @@
                 </a:solidFill>
                 <a:latin typeface="Calibri"/>
               </a:rPr>
-              <a:t>TALLER — Verificación de recepción (20 minutos) (cont.)</a:t>
+              <a:t>TALLER · cómo se revisa y dónde se entrega</a:t>
             </a:r>
           </a:p>
         </p:txBody>
@@ -6654,8 +6762,8 @@
         </p:nvSpPr>
         <p:spPr>
           <a:xfrm>
-            <a:off x="640080" y="1691639"/>
-            <a:ext cx="10911535" cy="4617720"/>
+            <a:off x="640080" y="1280160"/>
+            <a:ext cx="10911535" cy="411480"/>
           </a:xfrm>
           <a:prstGeom prst="rect">
             <a:avLst/>
@@ -6668,6 +6776,41 @@
           </a:bodyPr>
           <a:lstStyle/>
           <a:p>
+            <a:pPr algn="ctr"/>
+            <a:r>
+              <a:rPr sz="1500" b="0" i="0">
+                <a:solidFill>
+                  <a:srgbClr val="2B2B2B"/>
+                </a:solidFill>
+                <a:latin typeface="Calibri"/>
+              </a:rPr>
+              <a:t>Verificación de recepción</a:t>
+            </a:r>
+          </a:p>
+        </p:txBody>
+      </p:sp>
+      <p:sp>
+        <p:nvSpPr>
+          <p:cNvPr id="5" name="TextBox 4"/>
+          <p:cNvSpPr txBox="1"/>
+          <p:nvPr/>
+        </p:nvSpPr>
+        <p:spPr>
+          <a:xfrm>
+            <a:off x="640080" y="2011679"/>
+            <a:ext cx="10911535" cy="4297680"/>
+          </a:xfrm>
+          <a:prstGeom prst="rect">
+            <a:avLst/>
+          </a:prstGeom>
+          <a:noFill/>
+        </p:spPr>
+        <p:txBody>
+          <a:bodyPr wrap="square" anchor="t" lIns="0" rIns="0" tIns="0" bIns="0">
+            <a:spAutoFit/>
+          </a:bodyPr>
+          <a:lstStyle/>
+          <a:p>
             <a:pPr>
               <a:spcAft>
                 <a:spcPts val="1000"/>
@@ -6689,7 +6832,16 @@
                 </a:solidFill>
                 <a:latin typeface="Calibri"/>
               </a:rPr>
-              <a:t>Criterio de éxito (verificable):</a:t>
+              <a:t>Quedó bien si</a:t>
+            </a:r>
+            <a:r>
+              <a:rPr sz="1600" b="0" i="0">
+                <a:solidFill>
+                  <a:srgbClr val="2B2B2B"/>
+                </a:solidFill>
+                <a:latin typeface="Calibri"/>
+              </a:rPr>
+              <a:t> —compruébelo usted antes de cerrar el documento—:</a:t>
             </a:r>
           </a:p>
           <a:p>
@@ -6841,7 +6993,7 @@
                 </a:solidFill>
                 <a:latin typeface="Calibri"/>
               </a:rPr>
-              <a:t>Lo que dependa solo de usted, resuélvalo dentro de estos 20 minutos.</a:t>
+              <a:t>Plan B:</a:t>
             </a:r>
             <a:r>
               <a:rPr sz="1600" b="0" i="0">
@@ -6850,14 +7002,136 @@
                 </a:solidFill>
                 <a:latin typeface="Calibri"/>
               </a:rPr>
-              <a:t> No salga de clase con eso pendiente.</a:t>
-            </a:r>
-          </a:p>
-        </p:txBody>
-      </p:sp>
-      <p:sp>
-        <p:nvSpPr>
-          <p:cNvPr id="5" name="TextBox 4"/>
+              <a:t> Lo que dependa solo de usted, resuélvalo dentro del taller: no salga de clase con eso pendiente. Lo que dependa de un tercero, pásela a la lista con nombre y fecha.</a:t>
+            </a:r>
+          </a:p>
+          <a:p>
+            <a:pPr>
+              <a:spcAft>
+                <a:spcPts val="1000"/>
+              </a:spcAft>
+            </a:pPr>
+            <a:r>
+              <a:rPr sz="1600" b="0" i="0">
+                <a:solidFill>
+                  <a:srgbClr val="2B2B2B"/>
+                </a:solidFill>
+                <a:latin typeface="Calibri"/>
+              </a:rPr>
+              <a:t>–   </a:t>
+            </a:r>
+            <a:r>
+              <a:rPr sz="1600" b="1" i="0">
+                <a:solidFill>
+                  <a:srgbClr val="2B2B2B"/>
+                </a:solidFill>
+                <a:latin typeface="Calibri"/>
+              </a:rPr>
+              <a:t>Las entregas documentales del aula ya cerraron:</a:t>
+            </a:r>
+            <a:r>
+              <a:rPr sz="1600" b="0" i="0">
+                <a:solidFill>
+                  <a:srgbClr val="2B2B2B"/>
+                </a:solidFill>
+                <a:latin typeface="Calibri"/>
+              </a:rPr>
+              <a:t> la </a:t>
+            </a:r>
+            <a:r>
+              <a:rPr sz="1600" b="1" i="0">
+                <a:solidFill>
+                  <a:srgbClr val="2B2B2B"/>
+                </a:solidFill>
+                <a:latin typeface="Calibri"/>
+              </a:rPr>
+              <a:t>ACA Final</a:t>
+            </a:r>
+            <a:r>
+              <a:rPr sz="1600" b="0" i="0">
+                <a:solidFill>
+                  <a:srgbClr val="2B2B2B"/>
+                </a:solidFill>
+                <a:latin typeface="Calibri"/>
+              </a:rPr>
+              <a:t> cerró en la semana de la </a:t>
+            </a:r>
+            <a:r>
+              <a:rPr sz="1600" b="1" i="0">
+                <a:solidFill>
+                  <a:srgbClr val="2B2B2B"/>
+                </a:solidFill>
+                <a:latin typeface="Calibri"/>
+              </a:rPr>
+              <a:t>Sesión 13</a:t>
+            </a:r>
+            <a:r>
+              <a:rPr sz="1600" b="0" i="0">
+                <a:solidFill>
+                  <a:srgbClr val="2B2B2B"/>
+                </a:solidFill>
+                <a:latin typeface="Calibri"/>
+              </a:rPr>
+              <a:t>. Guarde `S15_CierreAdmin_Apellido` (Google Doc o PDF + capturas) en su Drive.</a:t>
+            </a:r>
+          </a:p>
+          <a:p>
+            <a:pPr>
+              <a:spcAft>
+                <a:spcPts val="1000"/>
+              </a:spcAft>
+            </a:pPr>
+            <a:r>
+              <a:rPr sz="1600" b="0" i="0">
+                <a:solidFill>
+                  <a:srgbClr val="2B2B2B"/>
+                </a:solidFill>
+                <a:latin typeface="Calibri"/>
+              </a:rPr>
+              <a:t>–   </a:t>
+            </a:r>
+            <a:r>
+              <a:rPr sz="1600" b="1" i="0">
+                <a:solidFill>
+                  <a:srgbClr val="2B2B2B"/>
+                </a:solidFill>
+                <a:latin typeface="Calibri"/>
+              </a:rPr>
+              <a:t>Lo que queda es verificar</a:t>
+            </a:r>
+            <a:r>
+              <a:rPr sz="1600" b="0" i="0">
+                <a:solidFill>
+                  <a:srgbClr val="2B2B2B"/>
+                </a:solidFill>
+                <a:latin typeface="Calibri"/>
+              </a:rPr>
+              <a:t>, no entregar: que cada cosa que subió aparezca en </a:t>
+            </a:r>
+            <a:r>
+              <a:rPr sz="1600" b="1" i="0">
+                <a:solidFill>
+                  <a:srgbClr val="2B2B2B"/>
+                </a:solidFill>
+                <a:latin typeface="Calibri"/>
+              </a:rPr>
+              <a:t>el aula de su grupo</a:t>
+            </a:r>
+            <a:r>
+              <a:rPr sz="1600" b="0" i="0">
+                <a:solidFill>
+                  <a:srgbClr val="2B2B2B"/>
+                </a:solidFill>
+                <a:latin typeface="Calibri"/>
+              </a:rPr>
+              <a:t> en CDigital con su estado confirmado.</a:t>
+            </a:r>
+          </a:p>
+        </p:txBody>
+      </p:sp>
+      <p:sp>
+        <p:nvSpPr>
+          <p:cNvPr id="6" name="TextBox 5"/>
           <p:cNvSpPr txBox="1"/>
           <p:nvPr/>
         </p:nvSpPr>
@@ -7103,7 +7377,7 @@
                           </a:solidFill>
                           <a:latin typeface="Calibri"/>
                         </a:rPr>
-                        <a:t>El artículo final está entregado y es la versión corregida</a:t>
+                        <a:t>El documento final está entregado y es la versión corregida</a:t>
                       </a:r>
                     </a:p>
                   </a:txBody>
@@ -7835,7 +8109,7 @@
                 </a:solidFill>
                 <a:latin typeface="Calibri"/>
               </a:rPr>
-              <a:t>–   Lo académico ya terminó: el artículo está escrito, la sustentación ocurrió, los ajustes se incorporaron.</a:t>
+              <a:t>–   Lo académico ya terminó: el documento está escrito, la sustentación ocurrió, los ajustes se incorporaron.</a:t>
             </a:r>
           </a:p>
           <a:p>
@@ -8140,7 +8414,25 @@
                 </a:solidFill>
                 <a:latin typeface="Calibri"/>
               </a:rPr>
-              <a:t> durante toda la sesión — [URL CDigital — campus del curso pendiente]. Hoy no se expone: se verifica.</a:t>
+              <a:t> durante toda la sesión — el aula de </a:t>
+            </a:r>
+            <a:r>
+              <a:rPr sz="1200" b="1" i="1">
+                <a:solidFill>
+                  <a:srgbClr val="2B2B2B"/>
+                </a:solidFill>
+                <a:latin typeface="Calibri"/>
+              </a:rPr>
+              <a:t>su grupo</a:t>
+            </a:r>
+            <a:r>
+              <a:rPr sz="1200" b="0" i="1">
+                <a:solidFill>
+                  <a:srgbClr val="2B2B2B"/>
+                </a:solidFill>
+                <a:latin typeface="Calibri"/>
+              </a:rPr>
+              <a:t> en CDigital. Hoy no se expone: se verifica.</a:t>
             </a:r>
           </a:p>
         </p:txBody>
@@ -8825,7 +9117,7 @@
                 </a:solidFill>
                 <a:latin typeface="Calibri"/>
               </a:rPr>
-              <a:t>artículo completo</a:t>
+              <a:t>documento completo</a:t>
             </a:r>
             <a:r>
               <a:rPr sz="1500" b="0" i="0">
@@ -9380,7 +9672,25 @@
                 </a:solidFill>
                 <a:latin typeface="Calibri"/>
               </a:rPr>
-              <a:t> `S15_CierreAdmin_Apellido` a CDigital — [URL CDigital — campus del curso pendiente], con el checklist y las evidencias.</a:t>
+              <a:t> `S15_CierreAdmin_Apellido` a CDigital — el aula de </a:t>
+            </a:r>
+            <a:r>
+              <a:rPr sz="1600" b="1" i="0">
+                <a:solidFill>
+                  <a:srgbClr val="2B2B2B"/>
+                </a:solidFill>
+                <a:latin typeface="Calibri"/>
+              </a:rPr>
+              <a:t>su grupo</a:t>
+            </a:r>
+            <a:r>
+              <a:rPr sz="1600" b="0" i="0">
+                <a:solidFill>
+                  <a:srgbClr val="2B2B2B"/>
+                </a:solidFill>
+                <a:latin typeface="Calibri"/>
+              </a:rPr>
+              <a:t> en CDigital, con el checklist y las evidencias.</a:t>
             </a:r>
           </a:p>
           <a:p>
@@ -9448,7 +9758,7 @@
                 </a:solidFill>
                 <a:latin typeface="Calibri"/>
               </a:rPr>
-              <a:t> su copia personal de todo: artículo, anexos, póster, guion de sustentación y evidencias de entrega.</a:t>
+              <a:t> su copia personal de todo: documento, anexos, póster, guion de sustentación y evidencias de entrega.</a:t>
             </a:r>
           </a:p>
           <a:p>
@@ -9482,7 +9792,7 @@
                 </a:solidFill>
                 <a:latin typeface="Calibri"/>
               </a:rPr>
-              <a:t> de su artículo en el repositorio cuando quede publicado: le va a servir mucho antes de lo que cree.</a:t>
+              <a:t> de su documento en el repositorio cuando quede publicado: le va a servir mucho antes de lo que cree.</a:t>
             </a:r>
           </a:p>
           <a:p>
@@ -9507,7 +9817,7 @@
                 </a:solidFill>
                 <a:latin typeface="Calibri"/>
               </a:rPr>
-              <a:t>Vuelva a leer su artículo dentro de un mes.</a:t>
+              <a:t>Vuelva a leer su documento dentro de un mes.</a:t>
             </a:r>
             <a:r>
               <a:rPr sz="1600" b="0" i="0">
@@ -9591,7 +9901,7 @@
                 </a:solidFill>
                 <a:latin typeface="Calibri"/>
               </a:rPr>
-              <a:t>un artículo publicado y una defensa hecha</a:t>
+              <a:t>un documento publicado y una defensa hecha</a:t>
             </a:r>
             <a:r>
               <a:rPr sz="1600" b="0" i="0">
@@ -9649,6 +9959,1214 @@
 </file>
 
 <file path=ppt/slides/slide24.xml><?xml version="1.0" encoding="utf-8"?>
+<p:sld xmlns:a="http://schemas.openxmlformats.org/drawingml/2006/main" xmlns:p="http://schemas.openxmlformats.org/presentationml/2006/main" xmlns:r="http://schemas.openxmlformats.org/officeDocument/2006/relationships">
+  <p:cSld>
+    <p:bg>
+      <p:bgPr>
+        <a:solidFill>
+          <a:srgbClr val="FFFFFF"/>
+        </a:solidFill>
+        <a:effectLst/>
+      </p:bgPr>
+    </p:bg>
+    <p:spTree>
+      <p:nvGrpSpPr>
+        <p:cNvPr id="1" name=""/>
+        <p:cNvGrpSpPr/>
+        <p:nvPr/>
+      </p:nvGrpSpPr>
+      <p:grpSpPr/>
+      <p:sp>
+        <p:nvSpPr>
+          <p:cNvPr id="2" name="Rectangle 1"/>
+          <p:cNvSpPr/>
+          <p:nvPr/>
+        </p:nvSpPr>
+        <p:spPr>
+          <a:xfrm>
+            <a:off x="0" y="0"/>
+            <a:ext cx="12191695" cy="1188720"/>
+          </a:xfrm>
+          <a:prstGeom prst="rect">
+            <a:avLst/>
+          </a:prstGeom>
+          <a:solidFill>
+            <a:srgbClr val="0C2340"/>
+          </a:solidFill>
+          <a:ln>
+            <a:noFill/>
+          </a:ln>
+          <a:effectLst/>
+        </p:spPr>
+        <p:style>
+          <a:lnRef idx="1">
+            <a:schemeClr val="accent1"/>
+          </a:lnRef>
+          <a:fillRef idx="3">
+            <a:schemeClr val="accent1"/>
+          </a:fillRef>
+          <a:effectRef idx="2">
+            <a:schemeClr val="accent1"/>
+          </a:effectRef>
+          <a:fontRef idx="minor">
+            <a:schemeClr val="lt1"/>
+          </a:fontRef>
+        </p:style>
+        <p:txBody>
+          <a:bodyPr rtlCol="0" anchor="ctr"/>
+          <a:lstStyle/>
+          <a:p>
+            <a:pPr algn="ctr"/>
+          </a:p>
+        </p:txBody>
+      </p:sp>
+      <p:sp>
+        <p:nvSpPr>
+          <p:cNvPr id="3" name="TextBox 2"/>
+          <p:cNvSpPr txBox="1"/>
+          <p:nvPr/>
+        </p:nvSpPr>
+        <p:spPr>
+          <a:xfrm>
+            <a:off x="640080" y="0"/>
+            <a:ext cx="9082735" cy="1188720"/>
+          </a:xfrm>
+          <a:prstGeom prst="rect">
+            <a:avLst/>
+          </a:prstGeom>
+          <a:noFill/>
+        </p:spPr>
+        <p:txBody>
+          <a:bodyPr wrap="square" anchor="ctr" lIns="0" rIns="0" tIns="0" bIns="0">
+            <a:spAutoFit/>
+          </a:bodyPr>
+          <a:lstStyle/>
+          <a:p>
+            <a:pPr algn="ctr"/>
+            <a:r>
+              <a:rPr sz="2600" b="1" i="0">
+                <a:solidFill>
+                  <a:srgbClr val="FFFFFF"/>
+                </a:solidFill>
+                <a:latin typeface="Calibri"/>
+              </a:rPr>
+              <a:t>RUTA DE ENTREGABLES DEL CURSO</a:t>
+            </a:r>
+          </a:p>
+        </p:txBody>
+      </p:sp>
+      <p:sp>
+        <p:nvSpPr>
+          <p:cNvPr id="4" name="TextBox 3"/>
+          <p:cNvSpPr txBox="1"/>
+          <p:nvPr/>
+        </p:nvSpPr>
+        <p:spPr>
+          <a:xfrm>
+            <a:off x="640080" y="1280160"/>
+            <a:ext cx="10911535" cy="411480"/>
+          </a:xfrm>
+          <a:prstGeom prst="rect">
+            <a:avLst/>
+          </a:prstGeom>
+          <a:noFill/>
+        </p:spPr>
+        <p:txBody>
+          <a:bodyPr wrap="square" anchor="t" lIns="0" rIns="0" tIns="0" bIns="0">
+            <a:spAutoFit/>
+          </a:bodyPr>
+          <a:lstStyle/>
+          <a:p>
+            <a:pPr algn="ctr"/>
+            <a:r>
+              <a:rPr sz="1500" b="0" i="0">
+                <a:solidFill>
+                  <a:srgbClr val="2B2B2B"/>
+                </a:solidFill>
+                <a:latin typeface="Calibri"/>
+              </a:rPr>
+              <a:t>Sin fechas a propósito: aquí va </a:t>
+            </a:r>
+            <a:r>
+              <a:rPr sz="1500" b="1" i="0">
+                <a:solidFill>
+                  <a:srgbClr val="2B2B2B"/>
+                </a:solidFill>
+                <a:latin typeface="Calibri"/>
+              </a:rPr>
+              <a:t>en qué punto del curso</a:t>
+            </a:r>
+            <a:r>
+              <a:rPr sz="1500" b="0" i="0">
+                <a:solidFill>
+                  <a:srgbClr val="2B2B2B"/>
+                </a:solidFill>
+                <a:latin typeface="Calibri"/>
+              </a:rPr>
+              <a:t> cierra cada ítem · la ventana exacta la fija CDigital</a:t>
+            </a:r>
+          </a:p>
+        </p:txBody>
+      </p:sp>
+      <p:graphicFrame>
+        <p:nvGraphicFramePr>
+          <p:cNvPr id="5" name="Table 4"/>
+          <p:cNvGraphicFramePr>
+            <a:graphicFrameLocks noGrp="1"/>
+          </p:cNvGraphicFramePr>
+          <p:nvPr/>
+        </p:nvGraphicFramePr>
+        <p:xfrm>
+          <a:off x="640080" y="2011679"/>
+          <a:ext cx="10911533" cy="4297680"/>
+        </p:xfrm>
+        <a:graphic>
+          <a:graphicData uri="http://schemas.openxmlformats.org/drawingml/2006/table">
+            <a:tbl>
+              <a:tblPr>
+                <a:tableStyleId>{2D5ABB26-0587-4C30-8999-92F81FD0307C}</a:tableStyleId>
+              </a:tblPr>
+              <a:tblGrid>
+                <a:gridCol w="2659113"/>
+                <a:gridCol w="2659113"/>
+                <a:gridCol w="5593307"/>
+              </a:tblGrid>
+              <a:tr h="477520">
+                <a:tc>
+                  <a:txBody>
+                    <a:bodyPr/>
+                    <a:lstStyle/>
+                    <a:p>
+                      <a:pPr algn="l"/>
+                      <a:r>
+                        <a:rPr sz="1300" b="1" i="0">
+                          <a:solidFill>
+                            <a:srgbClr val="FFFFFF"/>
+                          </a:solidFill>
+                          <a:latin typeface="Calibri"/>
+                        </a:rPr>
+                        <a:t>Cierra en la semana de…</a:t>
+                      </a:r>
+                    </a:p>
+                  </a:txBody>
+                  <a:tcPr anchor="ctr" marL="109728" marR="91440" marT="36576" marB="36576">
+                    <a:solidFill>
+                      <a:srgbClr val="0C2340"/>
+                    </a:solidFill>
+                  </a:tcPr>
+                </a:tc>
+                <a:tc>
+                  <a:txBody>
+                    <a:bodyPr/>
+                    <a:lstStyle/>
+                    <a:p>
+                      <a:pPr algn="l"/>
+                      <a:r>
+                        <a:rPr sz="1300" b="1" i="0">
+                          <a:solidFill>
+                            <a:srgbClr val="FFFFFF"/>
+                          </a:solidFill>
+                          <a:latin typeface="Calibri"/>
+                        </a:rPr>
+                        <a:t>Entregable</a:t>
+                      </a:r>
+                    </a:p>
+                  </a:txBody>
+                  <a:tcPr anchor="ctr" marL="109728" marR="91440" marT="36576" marB="36576">
+                    <a:solidFill>
+                      <a:srgbClr val="0C2340"/>
+                    </a:solidFill>
+                  </a:tcPr>
+                </a:tc>
+                <a:tc>
+                  <a:txBody>
+                    <a:bodyPr/>
+                    <a:lstStyle/>
+                    <a:p>
+                      <a:pPr algn="l"/>
+                      <a:r>
+                        <a:rPr sz="1300" b="1" i="0">
+                          <a:solidFill>
+                            <a:srgbClr val="FFFFFF"/>
+                          </a:solidFill>
+                          <a:latin typeface="Calibri"/>
+                        </a:rPr>
+                        <a:t>Qué debes tener listo</a:t>
+                      </a:r>
+                    </a:p>
+                  </a:txBody>
+                  <a:tcPr anchor="ctr" marL="109728" marR="91440" marT="36576" marB="36576">
+                    <a:solidFill>
+                      <a:srgbClr val="0C2340"/>
+                    </a:solidFill>
+                  </a:tcPr>
+                </a:tc>
+              </a:tr>
+              <a:tr h="477520">
+                <a:tc>
+                  <a:txBody>
+                    <a:bodyPr/>
+                    <a:lstStyle/>
+                    <a:p>
+                      <a:pPr algn="l"/>
+                      <a:r>
+                        <a:rPr sz="1100" b="1" i="0">
+                          <a:solidFill>
+                            <a:srgbClr val="2B2B2B"/>
+                          </a:solidFill>
+                          <a:latin typeface="Calibri"/>
+                        </a:rPr>
+                        <a:t>Sesión 03</a:t>
+                      </a:r>
+                      <a:r>
+                        <a:rPr sz="1100" b="0" i="0">
+                          <a:solidFill>
+                            <a:srgbClr val="2B2B2B"/>
+                          </a:solidFill>
+                          <a:latin typeface="Calibri"/>
+                        </a:rPr>
+                        <a:t> · ya cerró</a:t>
+                      </a:r>
+                    </a:p>
+                  </a:txBody>
+                  <a:tcPr anchor="ctr" marL="109728" marR="91440" marT="36576" marB="36576">
+                    <a:solidFill>
+                      <a:srgbClr val="FFFFFF"/>
+                    </a:solidFill>
+                  </a:tcPr>
+                </a:tc>
+                <a:tc>
+                  <a:txBody>
+                    <a:bodyPr/>
+                    <a:lstStyle/>
+                    <a:p>
+                      <a:pPr algn="l"/>
+                      <a:r>
+                        <a:rPr sz="1100" b="1" i="0">
+                          <a:solidFill>
+                            <a:srgbClr val="2B2B2B"/>
+                          </a:solidFill>
+                          <a:latin typeface="Calibri"/>
+                        </a:rPr>
+                        <a:t>Quiz 1</a:t>
+                      </a:r>
+                      <a:r>
+                        <a:rPr sz="1100" b="0" i="0">
+                          <a:solidFill>
+                            <a:srgbClr val="2B2B2B"/>
+                          </a:solidFill>
+                          <a:latin typeface="Calibri"/>
+                        </a:rPr>
+                        <a:t> · Cuestionario · 6%</a:t>
+                      </a:r>
+                    </a:p>
+                  </a:txBody>
+                  <a:tcPr anchor="ctr" marL="109728" marR="91440" marT="36576" marB="36576">
+                    <a:solidFill>
+                      <a:srgbClr val="FFFFFF"/>
+                    </a:solidFill>
+                  </a:tcPr>
+                </a:tc>
+                <a:tc>
+                  <a:txBody>
+                    <a:bodyPr/>
+                    <a:lstStyle/>
+                    <a:p>
+                      <a:pPr algn="l"/>
+                      <a:r>
+                        <a:rPr sz="1100" b="0" i="0">
+                          <a:solidFill>
+                            <a:srgbClr val="2B2B2B"/>
+                          </a:solidFill>
+                          <a:latin typeface="Calibri"/>
+                        </a:rPr>
+                        <a:t>Repasa </a:t>
+                      </a:r>
+                      <a:r>
+                        <a:rPr sz="1100" b="1" i="0">
+                          <a:solidFill>
+                            <a:srgbClr val="2B2B2B"/>
+                          </a:solidFill>
+                          <a:latin typeface="Calibri"/>
+                        </a:rPr>
+                        <a:t>pregunta, objetivos y título</a:t>
+                      </a:r>
+                      <a:r>
+                        <a:rPr sz="1100" b="0" i="0">
+                          <a:solidFill>
+                            <a:srgbClr val="2B2B2B"/>
+                          </a:solidFill>
+                          <a:latin typeface="Calibri"/>
+                        </a:rPr>
+                        <a:t> y las variables de la pregunta-problema.</a:t>
+                      </a:r>
+                    </a:p>
+                  </a:txBody>
+                  <a:tcPr anchor="ctr" marL="109728" marR="91440" marT="36576" marB="36576">
+                    <a:solidFill>
+                      <a:srgbClr val="FFFFFF"/>
+                    </a:solidFill>
+                  </a:tcPr>
+                </a:tc>
+              </a:tr>
+              <a:tr h="477520">
+                <a:tc>
+                  <a:txBody>
+                    <a:bodyPr/>
+                    <a:lstStyle/>
+                    <a:p>
+                      <a:pPr algn="l"/>
+                      <a:r>
+                        <a:rPr sz="1100" b="1" i="0">
+                          <a:solidFill>
+                            <a:srgbClr val="2B2B2B"/>
+                          </a:solidFill>
+                          <a:latin typeface="Calibri"/>
+                        </a:rPr>
+                        <a:t>Sesión 06</a:t>
+                      </a:r>
+                      <a:r>
+                        <a:rPr sz="1100" b="0" i="0">
+                          <a:solidFill>
+                            <a:srgbClr val="2B2B2B"/>
+                          </a:solidFill>
+                          <a:latin typeface="Calibri"/>
+                        </a:rPr>
+                        <a:t> · ya cerró</a:t>
+                      </a:r>
+                    </a:p>
+                  </a:txBody>
+                  <a:tcPr anchor="ctr" marL="109728" marR="91440" marT="36576" marB="36576">
+                    <a:solidFill>
+                      <a:srgbClr val="F2F2F2"/>
+                    </a:solidFill>
+                  </a:tcPr>
+                </a:tc>
+                <a:tc>
+                  <a:txBody>
+                    <a:bodyPr/>
+                    <a:lstStyle/>
+                    <a:p>
+                      <a:pPr algn="l"/>
+                      <a:r>
+                        <a:rPr sz="1100" b="1" i="0">
+                          <a:solidFill>
+                            <a:srgbClr val="2B2B2B"/>
+                          </a:solidFill>
+                          <a:latin typeface="Calibri"/>
+                        </a:rPr>
+                        <a:t>Parcial 1</a:t>
+                      </a:r>
+                      <a:r>
+                        <a:rPr sz="1100" b="0" i="0">
+                          <a:solidFill>
+                            <a:srgbClr val="2B2B2B"/>
+                          </a:solidFill>
+                          <a:latin typeface="Calibri"/>
+                        </a:rPr>
+                        <a:t> · Cuestionario · 24%</a:t>
+                      </a:r>
+                    </a:p>
+                  </a:txBody>
+                  <a:tcPr anchor="ctr" marL="109728" marR="91440" marT="36576" marB="36576">
+                    <a:solidFill>
+                      <a:srgbClr val="F2F2F2"/>
+                    </a:solidFill>
+                  </a:tcPr>
+                </a:tc>
+                <a:tc>
+                  <a:txBody>
+                    <a:bodyPr/>
+                    <a:lstStyle/>
+                    <a:p>
+                      <a:pPr algn="l"/>
+                      <a:r>
+                        <a:rPr sz="1100" b="0" i="0">
+                          <a:solidFill>
+                            <a:srgbClr val="2B2B2B"/>
+                          </a:solidFill>
+                          <a:latin typeface="Calibri"/>
+                        </a:rPr>
+                        <a:t>Estudia la </a:t>
+                      </a:r>
+                      <a:r>
+                        <a:rPr sz="1100" b="1" i="0">
+                          <a:solidFill>
+                            <a:srgbClr val="2B2B2B"/>
+                          </a:solidFill>
+                          <a:latin typeface="Calibri"/>
+                        </a:rPr>
+                        <a:t>introducción</a:t>
+                      </a:r>
+                      <a:r>
+                        <a:rPr sz="1100" b="0" i="0">
+                          <a:solidFill>
+                            <a:srgbClr val="2B2B2B"/>
+                          </a:solidFill>
+                          <a:latin typeface="Calibri"/>
+                        </a:rPr>
+                        <a:t>, los referentes Fase I y el instrumento ya diseñado.</a:t>
+                      </a:r>
+                    </a:p>
+                  </a:txBody>
+                  <a:tcPr anchor="ctr" marL="109728" marR="91440" marT="36576" marB="36576">
+                    <a:solidFill>
+                      <a:srgbClr val="F2F2F2"/>
+                    </a:solidFill>
+                  </a:tcPr>
+                </a:tc>
+              </a:tr>
+              <a:tr h="477520">
+                <a:tc>
+                  <a:txBody>
+                    <a:bodyPr/>
+                    <a:lstStyle/>
+                    <a:p>
+                      <a:pPr algn="l"/>
+                      <a:r>
+                        <a:rPr sz="1100" b="1" i="0">
+                          <a:solidFill>
+                            <a:srgbClr val="2B2B2B"/>
+                          </a:solidFill>
+                          <a:latin typeface="Calibri"/>
+                        </a:rPr>
+                        <a:t>Sesión 08</a:t>
+                      </a:r>
+                      <a:r>
+                        <a:rPr sz="1100" b="0" i="0">
+                          <a:solidFill>
+                            <a:srgbClr val="2B2B2B"/>
+                          </a:solidFill>
+                          <a:latin typeface="Calibri"/>
+                        </a:rPr>
+                        <a:t> · ya cerró</a:t>
+                      </a:r>
+                    </a:p>
+                  </a:txBody>
+                  <a:tcPr anchor="ctr" marL="109728" marR="91440" marT="36576" marB="36576">
+                    <a:solidFill>
+                      <a:srgbClr val="FFFFFF"/>
+                    </a:solidFill>
+                  </a:tcPr>
+                </a:tc>
+                <a:tc>
+                  <a:txBody>
+                    <a:bodyPr/>
+                    <a:lstStyle/>
+                    <a:p>
+                      <a:pPr algn="l"/>
+                      <a:r>
+                        <a:rPr sz="1100" b="1" i="0">
+                          <a:solidFill>
+                            <a:srgbClr val="2B2B2B"/>
+                          </a:solidFill>
+                          <a:latin typeface="Calibri"/>
+                        </a:rPr>
+                        <a:t>Quiz 2</a:t>
+                      </a:r>
+                      <a:r>
+                        <a:rPr sz="1100" b="0" i="0">
+                          <a:solidFill>
+                            <a:srgbClr val="2B2B2B"/>
+                          </a:solidFill>
+                          <a:latin typeface="Calibri"/>
+                        </a:rPr>
+                        <a:t> · Cuestionario · 9%</a:t>
+                      </a:r>
+                    </a:p>
+                  </a:txBody>
+                  <a:tcPr anchor="ctr" marL="109728" marR="91440" marT="36576" marB="36576">
+                    <a:solidFill>
+                      <a:srgbClr val="FFFFFF"/>
+                    </a:solidFill>
+                  </a:tcPr>
+                </a:tc>
+                <a:tc>
+                  <a:txBody>
+                    <a:bodyPr/>
+                    <a:lstStyle/>
+                    <a:p>
+                      <a:pPr algn="l"/>
+                      <a:r>
+                        <a:rPr sz="1100" b="0" i="0">
+                          <a:solidFill>
+                            <a:srgbClr val="2B2B2B"/>
+                          </a:solidFill>
+                          <a:latin typeface="Calibri"/>
+                        </a:rPr>
+                        <a:t>Estudia </a:t>
+                      </a:r>
+                      <a:r>
+                        <a:rPr sz="1100" b="1" i="0">
+                          <a:solidFill>
+                            <a:srgbClr val="2B2B2B"/>
+                          </a:solidFill>
+                          <a:latin typeface="Calibri"/>
+                        </a:rPr>
+                        <a:t>comunidades de práctica</a:t>
+                      </a:r>
+                      <a:r>
+                        <a:rPr sz="1100" b="0" i="0">
+                          <a:solidFill>
+                            <a:srgbClr val="2B2B2B"/>
+                          </a:solidFill>
+                          <a:latin typeface="Calibri"/>
+                        </a:rPr>
+                        <a:t>, co-creación y análisis de datos.</a:t>
+                      </a:r>
+                    </a:p>
+                  </a:txBody>
+                  <a:tcPr anchor="ctr" marL="109728" marR="91440" marT="36576" marB="36576">
+                    <a:solidFill>
+                      <a:srgbClr val="FFFFFF"/>
+                    </a:solidFill>
+                  </a:tcPr>
+                </a:tc>
+              </a:tr>
+              <a:tr h="477520">
+                <a:tc>
+                  <a:txBody>
+                    <a:bodyPr/>
+                    <a:lstStyle/>
+                    <a:p>
+                      <a:pPr algn="l"/>
+                      <a:r>
+                        <a:rPr sz="1100" b="1" i="0">
+                          <a:solidFill>
+                            <a:srgbClr val="2B2B2B"/>
+                          </a:solidFill>
+                          <a:latin typeface="Calibri"/>
+                        </a:rPr>
+                        <a:t>Sesión 10</a:t>
+                      </a:r>
+                      <a:r>
+                        <a:rPr sz="1100" b="0" i="0">
+                          <a:solidFill>
+                            <a:srgbClr val="2B2B2B"/>
+                          </a:solidFill>
+                          <a:latin typeface="Calibri"/>
+                        </a:rPr>
+                        <a:t> · ya cerró</a:t>
+                      </a:r>
+                    </a:p>
+                  </a:txBody>
+                  <a:tcPr anchor="ctr" marL="109728" marR="91440" marT="36576" marB="36576">
+                    <a:solidFill>
+                      <a:srgbClr val="F2F2F2"/>
+                    </a:solidFill>
+                  </a:tcPr>
+                </a:tc>
+                <a:tc>
+                  <a:txBody>
+                    <a:bodyPr/>
+                    <a:lstStyle/>
+                    <a:p>
+                      <a:pPr algn="l"/>
+                      <a:r>
+                        <a:rPr sz="1100" b="1" i="0">
+                          <a:solidFill>
+                            <a:srgbClr val="2B2B2B"/>
+                          </a:solidFill>
+                          <a:latin typeface="Calibri"/>
+                        </a:rPr>
+                        <a:t>Parcial 2</a:t>
+                      </a:r>
+                      <a:r>
+                        <a:rPr sz="1100" b="0" i="0">
+                          <a:solidFill>
+                            <a:srgbClr val="2B2B2B"/>
+                          </a:solidFill>
+                          <a:latin typeface="Calibri"/>
+                        </a:rPr>
+                        <a:t> · Cuestionario · 21%</a:t>
+                      </a:r>
+                    </a:p>
+                  </a:txBody>
+                  <a:tcPr anchor="ctr" marL="109728" marR="91440" marT="36576" marB="36576">
+                    <a:solidFill>
+                      <a:srgbClr val="F2F2F2"/>
+                    </a:solidFill>
+                  </a:tcPr>
+                </a:tc>
+                <a:tc>
+                  <a:txBody>
+                    <a:bodyPr/>
+                    <a:lstStyle/>
+                    <a:p>
+                      <a:pPr algn="l"/>
+                      <a:r>
+                        <a:rPr sz="1100" b="0" i="0">
+                          <a:solidFill>
+                            <a:srgbClr val="2B2B2B"/>
+                          </a:solidFill>
+                          <a:latin typeface="Calibri"/>
+                        </a:rPr>
+                        <a:t>Estudia el cierre del </a:t>
+                      </a:r>
+                      <a:r>
+                        <a:rPr sz="1100" b="1" i="0">
+                          <a:solidFill>
+                            <a:srgbClr val="2B2B2B"/>
+                          </a:solidFill>
+                          <a:latin typeface="Calibri"/>
+                        </a:rPr>
+                        <a:t>marco teórico</a:t>
+                      </a:r>
+                      <a:r>
+                        <a:rPr sz="1100" b="0" i="0">
+                          <a:solidFill>
+                            <a:srgbClr val="2B2B2B"/>
+                          </a:solidFill>
+                          <a:latin typeface="Calibri"/>
+                        </a:rPr>
+                        <a:t>, los resultados y la discusión.</a:t>
+                      </a:r>
+                    </a:p>
+                  </a:txBody>
+                  <a:tcPr anchor="ctr" marL="109728" marR="91440" marT="36576" marB="36576">
+                    <a:solidFill>
+                      <a:srgbClr val="F2F2F2"/>
+                    </a:solidFill>
+                  </a:tcPr>
+                </a:tc>
+              </a:tr>
+              <a:tr h="477520">
+                <a:tc>
+                  <a:txBody>
+                    <a:bodyPr/>
+                    <a:lstStyle/>
+                    <a:p>
+                      <a:pPr algn="l"/>
+                      <a:r>
+                        <a:rPr sz="1100" b="1" i="0">
+                          <a:solidFill>
+                            <a:srgbClr val="2B2B2B"/>
+                          </a:solidFill>
+                          <a:latin typeface="Calibri"/>
+                        </a:rPr>
+                        <a:t>Sesión 12</a:t>
+                      </a:r>
+                      <a:r>
+                        <a:rPr sz="1100" b="0" i="0">
+                          <a:solidFill>
+                            <a:srgbClr val="2B2B2B"/>
+                          </a:solidFill>
+                          <a:latin typeface="Calibri"/>
+                        </a:rPr>
+                        <a:t> · ya cerró</a:t>
+                      </a:r>
+                    </a:p>
+                  </a:txBody>
+                  <a:tcPr anchor="ctr" marL="109728" marR="91440" marT="36576" marB="36576">
+                    <a:solidFill>
+                      <a:srgbClr val="FFFFFF"/>
+                    </a:solidFill>
+                  </a:tcPr>
+                </a:tc>
+                <a:tc>
+                  <a:txBody>
+                    <a:bodyPr/>
+                    <a:lstStyle/>
+                    <a:p>
+                      <a:pPr algn="l"/>
+                      <a:r>
+                        <a:rPr sz="1100" b="1" i="0">
+                          <a:solidFill>
+                            <a:srgbClr val="2B2B2B"/>
+                          </a:solidFill>
+                          <a:latin typeface="Calibri"/>
+                        </a:rPr>
+                        <a:t>Quiz 3</a:t>
+                      </a:r>
+                      <a:r>
+                        <a:rPr sz="1100" b="0" i="0">
+                          <a:solidFill>
+                            <a:srgbClr val="2B2B2B"/>
+                          </a:solidFill>
+                          <a:latin typeface="Calibri"/>
+                        </a:rPr>
+                        <a:t> · Cuestionario · 4%</a:t>
+                      </a:r>
+                    </a:p>
+                  </a:txBody>
+                  <a:tcPr anchor="ctr" marL="109728" marR="91440" marT="36576" marB="36576">
+                    <a:solidFill>
+                      <a:srgbClr val="FFFFFF"/>
+                    </a:solidFill>
+                  </a:tcPr>
+                </a:tc>
+                <a:tc>
+                  <a:txBody>
+                    <a:bodyPr/>
+                    <a:lstStyle/>
+                    <a:p>
+                      <a:pPr algn="l"/>
+                      <a:r>
+                        <a:rPr sz="1100" b="0" i="0">
+                          <a:solidFill>
+                            <a:srgbClr val="2B2B2B"/>
+                          </a:solidFill>
+                          <a:latin typeface="Calibri"/>
+                        </a:rPr>
+                        <a:t>Ten claros </a:t>
+                      </a:r>
+                      <a:r>
+                        <a:rPr sz="1100" b="1" i="0">
+                          <a:solidFill>
+                            <a:srgbClr val="2B2B2B"/>
+                          </a:solidFill>
+                          <a:latin typeface="Calibri"/>
+                        </a:rPr>
+                        <a:t>resumen</a:t>
+                      </a:r>
+                      <a:r>
+                        <a:rPr sz="1100" b="0" i="0">
+                          <a:solidFill>
+                            <a:srgbClr val="2B2B2B"/>
+                          </a:solidFill>
+                          <a:latin typeface="Calibri"/>
+                        </a:rPr>
+                        <a:t>, palabras clave UNESCO, póster y verificación antiplagio.</a:t>
+                      </a:r>
+                    </a:p>
+                  </a:txBody>
+                  <a:tcPr anchor="ctr" marL="109728" marR="91440" marT="36576" marB="36576">
+                    <a:solidFill>
+                      <a:srgbClr val="FFFFFF"/>
+                    </a:solidFill>
+                  </a:tcPr>
+                </a:tc>
+              </a:tr>
+              <a:tr h="477520">
+                <a:tc>
+                  <a:txBody>
+                    <a:bodyPr/>
+                    <a:lstStyle/>
+                    <a:p>
+                      <a:pPr algn="l"/>
+                      <a:r>
+                        <a:rPr sz="1100" b="1" i="0">
+                          <a:solidFill>
+                            <a:srgbClr val="2B2B2B"/>
+                          </a:solidFill>
+                          <a:latin typeface="Calibri"/>
+                        </a:rPr>
+                        <a:t>Sesión 13</a:t>
+                      </a:r>
+                      <a:r>
+                        <a:rPr sz="1100" b="0" i="0">
+                          <a:solidFill>
+                            <a:srgbClr val="2B2B2B"/>
+                          </a:solidFill>
+                          <a:latin typeface="Calibri"/>
+                        </a:rPr>
+                        <a:t> · ya cerró</a:t>
+                      </a:r>
+                    </a:p>
+                  </a:txBody>
+                  <a:tcPr anchor="ctr" marL="109728" marR="91440" marT="36576" marB="36576">
+                    <a:solidFill>
+                      <a:srgbClr val="F2F2F2"/>
+                    </a:solidFill>
+                  </a:tcPr>
+                </a:tc>
+                <a:tc>
+                  <a:txBody>
+                    <a:bodyPr/>
+                    <a:lstStyle/>
+                    <a:p>
+                      <a:pPr algn="l"/>
+                      <a:r>
+                        <a:rPr sz="1100" b="1" i="0">
+                          <a:solidFill>
+                            <a:srgbClr val="2B2B2B"/>
+                          </a:solidFill>
+                          <a:latin typeface="Calibri"/>
+                        </a:rPr>
+                        <a:t>ACA Final</a:t>
+                      </a:r>
+                      <a:r>
+                        <a:rPr sz="1100" b="0" i="0">
+                          <a:solidFill>
+                            <a:srgbClr val="2B2B2B"/>
+                          </a:solidFill>
+                          <a:latin typeface="Calibri"/>
+                        </a:rPr>
+                        <a:t> · Tarea · 32%</a:t>
+                      </a:r>
+                    </a:p>
+                  </a:txBody>
+                  <a:tcPr anchor="ctr" marL="109728" marR="91440" marT="36576" marB="36576">
+                    <a:solidFill>
+                      <a:srgbClr val="F2F2F2"/>
+                    </a:solidFill>
+                  </a:tcPr>
+                </a:tc>
+                <a:tc>
+                  <a:txBody>
+                    <a:bodyPr/>
+                    <a:lstStyle/>
+                    <a:p>
+                      <a:pPr algn="l"/>
+                      <a:r>
+                        <a:rPr sz="1100" b="0" i="0">
+                          <a:solidFill>
+                            <a:srgbClr val="2B2B2B"/>
+                          </a:solidFill>
+                          <a:latin typeface="Calibri"/>
+                        </a:rPr>
+                        <a:t>Sube el </a:t>
+                      </a:r>
+                      <a:r>
+                        <a:rPr sz="1100" b="1" i="0">
+                          <a:solidFill>
+                            <a:srgbClr val="2B2B2B"/>
+                          </a:solidFill>
+                          <a:latin typeface="Calibri"/>
+                        </a:rPr>
+                        <a:t>documento final</a:t>
+                      </a:r>
+                      <a:r>
+                        <a:rPr sz="1100" b="0" i="0">
+                          <a:solidFill>
+                            <a:srgbClr val="2B2B2B"/>
+                          </a:solidFill>
+                          <a:latin typeface="Calibri"/>
+                        </a:rPr>
+                        <a:t> en plantilla APA CUN: mínimo 4.000 palabras y 50 referencias.</a:t>
+                      </a:r>
+                    </a:p>
+                  </a:txBody>
+                  <a:tcPr anchor="ctr" marL="109728" marR="91440" marT="36576" marB="36576">
+                    <a:solidFill>
+                      <a:srgbClr val="F2F2F2"/>
+                    </a:solidFill>
+                  </a:tcPr>
+                </a:tc>
+              </a:tr>
+              <a:tr h="477520">
+                <a:tc>
+                  <a:txBody>
+                    <a:bodyPr/>
+                    <a:lstStyle/>
+                    <a:p>
+                      <a:pPr algn="l"/>
+                      <a:r>
+                        <a:rPr sz="1100" b="1" i="0">
+                          <a:solidFill>
+                            <a:srgbClr val="2B2B2B"/>
+                          </a:solidFill>
+                          <a:latin typeface="Calibri"/>
+                        </a:rPr>
+                        <a:t>Sesión 14</a:t>
+                      </a:r>
+                      <a:r>
+                        <a:rPr sz="1100" b="0" i="0">
+                          <a:solidFill>
+                            <a:srgbClr val="2B2B2B"/>
+                          </a:solidFill>
+                          <a:latin typeface="Calibri"/>
+                        </a:rPr>
+                        <a:t> · ya cerró</a:t>
+                      </a:r>
+                    </a:p>
+                  </a:txBody>
+                  <a:tcPr anchor="ctr" marL="109728" marR="91440" marT="36576" marB="36576">
+                    <a:solidFill>
+                      <a:srgbClr val="FFFFFF"/>
+                    </a:solidFill>
+                  </a:tcPr>
+                </a:tc>
+                <a:tc>
+                  <a:txBody>
+                    <a:bodyPr/>
+                    <a:lstStyle/>
+                    <a:p>
+                      <a:pPr algn="l"/>
+                      <a:r>
+                        <a:rPr sz="1100" b="1" i="0">
+                          <a:solidFill>
+                            <a:srgbClr val="2B2B2B"/>
+                          </a:solidFill>
+                          <a:latin typeface="Calibri"/>
+                        </a:rPr>
+                        <a:t>Autoevaluación</a:t>
+                      </a:r>
+                      <a:r>
+                        <a:rPr sz="1100" b="0" i="0">
+                          <a:solidFill>
+                            <a:srgbClr val="2B2B2B"/>
+                          </a:solidFill>
+                          <a:latin typeface="Calibri"/>
+                        </a:rPr>
+                        <a:t> · Cuestionario · 2%</a:t>
+                      </a:r>
+                    </a:p>
+                  </a:txBody>
+                  <a:tcPr anchor="ctr" marL="109728" marR="91440" marT="36576" marB="36576">
+                    <a:solidFill>
+                      <a:srgbClr val="FFFFFF"/>
+                    </a:solidFill>
+                  </a:tcPr>
+                </a:tc>
+                <a:tc>
+                  <a:txBody>
+                    <a:bodyPr/>
+                    <a:lstStyle/>
+                    <a:p>
+                      <a:pPr algn="l"/>
+                      <a:r>
+                        <a:rPr sz="1100" b="0" i="0">
+                          <a:solidFill>
+                            <a:srgbClr val="2B2B2B"/>
+                          </a:solidFill>
+                          <a:latin typeface="Calibri"/>
+                        </a:rPr>
+                        <a:t>Diligénciala </a:t>
+                      </a:r>
+                      <a:r>
+                        <a:rPr sz="1100" b="1" i="0">
+                          <a:solidFill>
+                            <a:srgbClr val="2B2B2B"/>
+                          </a:solidFill>
+                          <a:latin typeface="Calibri"/>
+                        </a:rPr>
+                        <a:t>tú</a:t>
+                      </a:r>
+                      <a:r>
+                        <a:rPr sz="1100" b="0" i="0">
+                          <a:solidFill>
+                            <a:srgbClr val="2B2B2B"/>
+                          </a:solidFill>
+                          <a:latin typeface="Calibri"/>
+                        </a:rPr>
+                        <a:t>, dentro de su ventana, sobre tu participación real.</a:t>
+                      </a:r>
+                    </a:p>
+                  </a:txBody>
+                  <a:tcPr anchor="ctr" marL="109728" marR="91440" marT="36576" marB="36576">
+                    <a:solidFill>
+                      <a:srgbClr val="FFFFFF"/>
+                    </a:solidFill>
+                  </a:tcPr>
+                </a:tc>
+              </a:tr>
+              <a:tr h="477520">
+                <a:tc>
+                  <a:txBody>
+                    <a:bodyPr/>
+                    <a:lstStyle/>
+                    <a:p>
+                      <a:pPr algn="l"/>
+                      <a:r>
+                        <a:rPr sz="1100" b="1" i="0">
+                          <a:solidFill>
+                            <a:srgbClr val="2B2B2B"/>
+                          </a:solidFill>
+                          <a:latin typeface="Calibri"/>
+                        </a:rPr>
+                        <a:t>Sesión 14</a:t>
+                      </a:r>
+                      <a:r>
+                        <a:rPr sz="1100" b="0" i="0">
+                          <a:solidFill>
+                            <a:srgbClr val="2B2B2B"/>
+                          </a:solidFill>
+                          <a:latin typeface="Calibri"/>
+                        </a:rPr>
+                        <a:t> · ya cerró</a:t>
+                      </a:r>
+                    </a:p>
+                  </a:txBody>
+                  <a:tcPr anchor="ctr" marL="109728" marR="91440" marT="36576" marB="36576">
+                    <a:solidFill>
+                      <a:srgbClr val="F2F2F2"/>
+                    </a:solidFill>
+                  </a:tcPr>
+                </a:tc>
+                <a:tc>
+                  <a:txBody>
+                    <a:bodyPr/>
+                    <a:lstStyle/>
+                    <a:p>
+                      <a:pPr algn="l"/>
+                      <a:r>
+                        <a:rPr sz="1100" b="1" i="0">
+                          <a:solidFill>
+                            <a:srgbClr val="2B2B2B"/>
+                          </a:solidFill>
+                          <a:latin typeface="Calibri"/>
+                        </a:rPr>
+                        <a:t>Coevaluación</a:t>
+                      </a:r>
+                      <a:r>
+                        <a:rPr sz="1100" b="0" i="0">
+                          <a:solidFill>
+                            <a:srgbClr val="2B2B2B"/>
+                          </a:solidFill>
+                          <a:latin typeface="Calibri"/>
+                        </a:rPr>
+                        <a:t> · Foro · 2%</a:t>
+                      </a:r>
+                    </a:p>
+                  </a:txBody>
+                  <a:tcPr anchor="ctr" marL="109728" marR="91440" marT="36576" marB="36576">
+                    <a:solidFill>
+                      <a:srgbClr val="F2F2F2"/>
+                    </a:solidFill>
+                  </a:tcPr>
+                </a:tc>
+                <a:tc>
+                  <a:txBody>
+                    <a:bodyPr/>
+                    <a:lstStyle/>
+                    <a:p>
+                      <a:pPr algn="l"/>
+                      <a:r>
+                        <a:rPr sz="1100" b="1" i="0">
+                          <a:solidFill>
+                            <a:srgbClr val="2B2B2B"/>
+                          </a:solidFill>
+                          <a:latin typeface="Calibri"/>
+                        </a:rPr>
+                        <a:t>Publica</a:t>
+                      </a:r>
+                      <a:r>
+                        <a:rPr sz="1100" b="0" i="0">
+                          <a:solidFill>
+                            <a:srgbClr val="2B2B2B"/>
+                          </a:solidFill>
+                          <a:latin typeface="Calibri"/>
+                        </a:rPr>
+                        <a:t> tu aporte dentro de la ventana: un borrador sin enviar no cuenta.</a:t>
+                      </a:r>
+                    </a:p>
+                  </a:txBody>
+                  <a:tcPr anchor="ctr" marL="109728" marR="91440" marT="36576" marB="36576">
+                    <a:solidFill>
+                      <a:srgbClr val="F2F2F2"/>
+                    </a:solidFill>
+                  </a:tcPr>
+                </a:tc>
+              </a:tr>
+            </a:tbl>
+          </a:graphicData>
+        </a:graphic>
+      </p:graphicFrame>
+      <p:sp>
+        <p:nvSpPr>
+          <p:cNvPr id="6" name="TextBox 5"/>
+          <p:cNvSpPr txBox="1"/>
+          <p:nvPr/>
+        </p:nvSpPr>
+        <p:spPr>
+          <a:xfrm>
+            <a:off x="640080" y="6080760"/>
+            <a:ext cx="10911535" cy="548640"/>
+          </a:xfrm>
+          <a:prstGeom prst="rect">
+            <a:avLst/>
+          </a:prstGeom>
+          <a:noFill/>
+        </p:spPr>
+        <p:txBody>
+          <a:bodyPr wrap="square" anchor="t" lIns="0" rIns="0" tIns="0" bIns="0">
+            <a:spAutoFit/>
+          </a:bodyPr>
+          <a:lstStyle/>
+          <a:p>
+            <a:r>
+              <a:rPr sz="1200" b="0" i="1">
+                <a:solidFill>
+                  <a:srgbClr val="2B2B2B"/>
+                </a:solidFill>
+                <a:latin typeface="Calibri"/>
+              </a:rPr>
+              <a:t>Esta misma tabla va al final de todas las sesiones. La </a:t>
+            </a:r>
+            <a:r>
+              <a:rPr sz="1200" b="1" i="1">
+                <a:solidFill>
+                  <a:srgbClr val="2B2B2B"/>
+                </a:solidFill>
+                <a:latin typeface="Calibri"/>
+              </a:rPr>
+              <a:t>fecha</a:t>
+            </a:r>
+            <a:r>
+              <a:rPr sz="1200" b="0" i="1">
+                <a:solidFill>
+                  <a:srgbClr val="2B2B2B"/>
+                </a:solidFill>
+                <a:latin typeface="Calibri"/>
+              </a:rPr>
+              <a:t> de cada ventana está en el enunciado del ítem (`Clases/Recursos/ACAs/`) y en el aula: si el aula y cualquier otro material se contradicen, </a:t>
+            </a:r>
+            <a:r>
+              <a:rPr sz="1200" b="1" i="1">
+                <a:solidFill>
+                  <a:srgbClr val="2B2B2B"/>
+                </a:solidFill>
+                <a:latin typeface="Calibri"/>
+              </a:rPr>
+              <a:t>manda el aula</a:t>
+            </a:r>
+            <a:r>
+              <a:rPr sz="1200" b="0" i="1">
+                <a:solidFill>
+                  <a:srgbClr val="2B2B2B"/>
+                </a:solidFill>
+                <a:latin typeface="Calibri"/>
+              </a:rPr>
+              <a:t>.</a:t>
+            </a:r>
+          </a:p>
+        </p:txBody>
+      </p:sp>
+      <p:sp>
+        <p:nvSpPr>
+          <p:cNvPr id="7" name="TextBox 6"/>
+          <p:cNvSpPr txBox="1"/>
+          <p:nvPr/>
+        </p:nvSpPr>
+        <p:spPr>
+          <a:xfrm>
+            <a:off x="11094415" y="6446520"/>
+            <a:ext cx="548640" cy="274320"/>
+          </a:xfrm>
+          <a:prstGeom prst="rect">
+            <a:avLst/>
+          </a:prstGeom>
+          <a:noFill/>
+        </p:spPr>
+        <p:txBody>
+          <a:bodyPr wrap="square" anchor="t" lIns="0" rIns="0" tIns="0" bIns="0">
+            <a:spAutoFit/>
+          </a:bodyPr>
+          <a:lstStyle/>
+          <a:p>
+            <a:pPr algn="r"/>
+            <a:r>
+              <a:rPr sz="1000" b="1" i="0">
+                <a:solidFill>
+                  <a:srgbClr val="8F989D"/>
+                </a:solidFill>
+                <a:latin typeface="Calibri"/>
+              </a:rPr>
+              <a:t>24</a:t>
+            </a:r>
+          </a:p>
+        </p:txBody>
+      </p:sp>
+    </p:spTree>
+  </p:cSld>
+  <p:clrMapOvr>
+    <a:masterClrMapping/>
+  </p:clrMapOvr>
+</p:sld>
+</file>
+
+<file path=ppt/slides/slide25.xml><?xml version="1.0" encoding="utf-8"?>
 <p:sld xmlns:a="http://schemas.openxmlformats.org/drawingml/2006/main" xmlns:p="http://schemas.openxmlformats.org/presentationml/2006/main" xmlns:r="http://schemas.openxmlformats.org/officeDocument/2006/relationships">
   <p:cSld>
     <p:bg>
@@ -10032,7 +11550,7 @@
                 </a:solidFill>
                 <a:latin typeface="Calibri"/>
               </a:rPr>
-              <a:t>●   Artículo completo, sustentación hecha, observaciones del jurado atendidas.</a:t>
+              <a:t>●   Documento completo, sustentación hecha, observaciones del jurado atendidas.</a:t>
             </a:r>
           </a:p>
           <a:p>
@@ -11265,7 +12783,7 @@
                           </a:solidFill>
                           <a:latin typeface="Calibri"/>
                         </a:rPr>
-                        <a:t>Artículo final (PDF)</a:t>
+                        <a:t>Documento final (PDF)</a:t>
                       </a:r>
                     </a:p>
                   </a:txBody>
